--- a/SOI-2025-0050 C300 Project Poster.pptx
+++ b/SOI-2025-0050 C300 Project Poster.pptx
@@ -143,6 +143,7 @@
   <p1510:revLst>
     <p1510:client id="{129BB058-FE4A-380F-61A4-D03767961E0F}" v="24" dt="2026-01-31T15:02:34.013"/>
     <p1510:client id="{542130D5-5BB2-72B0-9380-06AE5BDF3B0C}" v="387" dt="2026-02-01T07:21:02.908"/>
+    <p1510:client id="{733769C4-8349-8FC9-420A-C3DFFC7AF63C}" v="19" dt="2026-02-02T03:52:20.621"/>
   </p1510:revLst>
 </p1510:revInfo>
 </file>
@@ -229,7 +230,7 @@
           <a:p>
             <a:fld id="{7DC6AF4E-6B14-4F0E-97CD-1B44B475A93A}" type="datetimeFigureOut">
               <a:rPr lang="en-US" smtClean="0"/>
-              <a:t>1/31/2026</a:t>
+              <a:t>2/1/2026</a:t>
             </a:fld>
             <a:endParaRPr lang="en-US"/>
           </a:p>
@@ -880,7 +881,7 @@
           <a:p>
             <a:fld id="{DA06EDE8-2339-49EE-BD3B-4DC8F9E7DFE4}" type="datetimeFigureOut">
               <a:rPr lang="en-SG" smtClean="0"/>
-              <a:t>31/1/2026</a:t>
+              <a:t>1/2/2026</a:t>
             </a:fld>
             <a:endParaRPr lang="en-SG"/>
           </a:p>
@@ -1103,7 +1104,7 @@
           <a:p>
             <a:fld id="{DA06EDE8-2339-49EE-BD3B-4DC8F9E7DFE4}" type="datetimeFigureOut">
               <a:rPr lang="en-SG" smtClean="0"/>
-              <a:t>31/1/2026</a:t>
+              <a:t>1/2/2026</a:t>
             </a:fld>
             <a:endParaRPr lang="en-SG"/>
           </a:p>
@@ -1336,7 +1337,7 @@
           <a:p>
             <a:fld id="{DA06EDE8-2339-49EE-BD3B-4DC8F9E7DFE4}" type="datetimeFigureOut">
               <a:rPr lang="en-SG" smtClean="0"/>
-              <a:t>31/1/2026</a:t>
+              <a:t>1/2/2026</a:t>
             </a:fld>
             <a:endParaRPr lang="en-SG"/>
           </a:p>
@@ -1615,7 +1616,7 @@
           <a:p>
             <a:fld id="{DA06EDE8-2339-49EE-BD3B-4DC8F9E7DFE4}" type="datetimeFigureOut">
               <a:rPr lang="en-SG" smtClean="0"/>
-              <a:t>31/1/2026</a:t>
+              <a:t>1/2/2026</a:t>
             </a:fld>
             <a:endParaRPr lang="en-SG"/>
           </a:p>
@@ -2066,7 +2067,7 @@
           <a:p>
             <a:fld id="{DA06EDE8-2339-49EE-BD3B-4DC8F9E7DFE4}" type="datetimeFigureOut">
               <a:rPr lang="en-SG" smtClean="0"/>
-              <a:t>31/1/2026</a:t>
+              <a:t>1/2/2026</a:t>
             </a:fld>
             <a:endParaRPr lang="en-SG"/>
           </a:p>
@@ -2407,7 +2408,7 @@
           <a:p>
             <a:fld id="{DA06EDE8-2339-49EE-BD3B-4DC8F9E7DFE4}" type="datetimeFigureOut">
               <a:rPr lang="en-SG" smtClean="0"/>
-              <a:t>31/1/2026</a:t>
+              <a:t>1/2/2026</a:t>
             </a:fld>
             <a:endParaRPr lang="en-SG"/>
           </a:p>
@@ -2882,7 +2883,7 @@
           <a:p>
             <a:fld id="{DA06EDE8-2339-49EE-BD3B-4DC8F9E7DFE4}" type="datetimeFigureOut">
               <a:rPr lang="en-SG" smtClean="0"/>
-              <a:t>31/1/2026</a:t>
+              <a:t>1/2/2026</a:t>
             </a:fld>
             <a:endParaRPr lang="en-SG"/>
           </a:p>
@@ -3024,7 +3025,7 @@
           <a:p>
             <a:fld id="{DA06EDE8-2339-49EE-BD3B-4DC8F9E7DFE4}" type="datetimeFigureOut">
               <a:rPr lang="en-SG" smtClean="0"/>
-              <a:t>31/1/2026</a:t>
+              <a:t>1/2/2026</a:t>
             </a:fld>
             <a:endParaRPr lang="en-SG"/>
           </a:p>
@@ -3172,7 +3173,7 @@
           <a:p>
             <a:fld id="{DA06EDE8-2339-49EE-BD3B-4DC8F9E7DFE4}" type="datetimeFigureOut">
               <a:rPr lang="en-SG" smtClean="0"/>
-              <a:t>31/1/2026</a:t>
+              <a:t>1/2/2026</a:t>
             </a:fld>
             <a:endParaRPr lang="en-SG"/>
           </a:p>
@@ -3531,7 +3532,7 @@
           <a:p>
             <a:fld id="{DA06EDE8-2339-49EE-BD3B-4DC8F9E7DFE4}" type="datetimeFigureOut">
               <a:rPr lang="en-SG" smtClean="0"/>
-              <a:t>31/1/2026</a:t>
+              <a:t>1/2/2026</a:t>
             </a:fld>
             <a:endParaRPr lang="en-SG"/>
           </a:p>
@@ -3837,7 +3838,7 @@
           <a:p>
             <a:fld id="{DA06EDE8-2339-49EE-BD3B-4DC8F9E7DFE4}" type="datetimeFigureOut">
               <a:rPr lang="en-SG" smtClean="0"/>
-              <a:t>31/1/2026</a:t>
+              <a:t>1/2/2026</a:t>
             </a:fld>
             <a:endParaRPr lang="en-SG"/>
           </a:p>
@@ -4540,7 +4541,7 @@
                 <a:ea typeface="Tahoma"/>
                 <a:cs typeface="Arial"/>
               </a:rPr>
-              <a:t>Intelligent Document Retrieval and Question Answering System</a:t>
+              <a:t>Intelligent Document Retrieval &amp; Question Answering System</a:t>
             </a:r>
             <a:br>
               <a:rPr lang="en-SG" sz="8000" dirty="0">
@@ -4548,7 +4549,7 @@
               </a:rPr>
             </a:br>
             <a:r>
-              <a:rPr lang="en-SG" sz="4000">
+              <a:rPr lang="en-SG" sz="4000" dirty="0">
                 <a:latin typeface="Arial"/>
                 <a:ea typeface="Tahoma"/>
                 <a:cs typeface="Arial"/>
@@ -4556,14 +4557,14 @@
               <a:t>Partner Organisation: </a:t>
             </a:r>
             <a:r>
-              <a:rPr lang="en-SG" sz="4000" i="1">
+              <a:rPr lang="en-SG" sz="4000" i="1" dirty="0">
                 <a:latin typeface="Arial"/>
                 <a:ea typeface="Tahoma"/>
                 <a:cs typeface="Arial"/>
               </a:rPr>
               <a:t>IBM</a:t>
             </a:r>
-            <a:endParaRPr lang="en-US">
+            <a:endParaRPr lang="en-US" dirty="0">
               <a:latin typeface="Arial"/>
               <a:ea typeface="Tahoma"/>
               <a:cs typeface="Arial"/>
@@ -5307,6 +5308,36 @@
           </a:p>
         </p:txBody>
       </p:sp>
+      <p:pic>
+        <p:nvPicPr>
+          <p:cNvPr id="10" name="Picture 9" descr="A collage of a group of people&#10;&#10;AI-generated content may be incorrect.">
+            <a:extLst>
+              <a:ext uri="{FF2B5EF4-FFF2-40B4-BE49-F238E27FC236}">
+                <a16:creationId xmlns:a16="http://schemas.microsoft.com/office/drawing/2014/main" id="{00CC7FD7-E883-A64A-1E1A-12974A2CB9DF}"/>
+              </a:ext>
+            </a:extLst>
+          </p:cNvPr>
+          <p:cNvPicPr>
+            <a:picLocks noChangeAspect="1"/>
+          </p:cNvPicPr>
+          <p:nvPr/>
+        </p:nvPicPr>
+        <p:blipFill>
+          <a:blip r:embed="rId7"/>
+          <a:stretch>
+            <a:fillRect/>
+          </a:stretch>
+        </p:blipFill>
+        <p:spPr>
+          <a:xfrm>
+            <a:off x="17253032" y="135501"/>
+            <a:ext cx="3990369" cy="5532073"/>
+          </a:xfrm>
+          <a:prstGeom prst="rect">
+            <a:avLst/>
+          </a:prstGeom>
+        </p:spPr>
+      </p:pic>
     </p:spTree>
     <p:extLst>
       <p:ext uri="{BB962C8B-B14F-4D97-AF65-F5344CB8AC3E}">
@@ -5891,15 +5922,6 @@
 </file>
 
 <file path=customXml/item1.xml><?xml version="1.0" encoding="utf-8"?>
-<?mso-contentType ?>
-<FormTemplates xmlns="http://schemas.microsoft.com/sharepoint/v3/contenttype/forms">
-  <Display>DocumentLibraryForm</Display>
-  <Edit>DocumentLibraryForm</Edit>
-  <New>DocumentLibraryForm</New>
-</FormTemplates>
-</file>
-
-<file path=customXml/item2.xml><?xml version="1.0" encoding="utf-8"?>
 <ct:contentTypeSchema xmlns:ct="http://schemas.microsoft.com/office/2006/metadata/contentType" xmlns:ma="http://schemas.microsoft.com/office/2006/metadata/properties/metaAttributes" ct:_="" ma:_="" ma:contentTypeName="Document" ma:contentTypeID="0x010100AF45ACC263EA734D945ACC4F3E620966" ma:contentTypeVersion="16" ma:contentTypeDescription="Create a new document." ma:contentTypeScope="" ma:versionID="d40e9dae1d368b91bf3d3f3ef0447877">
   <xsd:schema xmlns:xsd="http://www.w3.org/2001/XMLSchema" xmlns:xs="http://www.w3.org/2001/XMLSchema" xmlns:p="http://schemas.microsoft.com/office/2006/metadata/properties" xmlns:ns1="http://schemas.microsoft.com/sharepoint/v3" xmlns:ns3="4273798a-8e7c-4150-b1eb-bb92c15cf154" xmlns:ns4="d2d8462b-6476-4c7d-8275-c0f09241600f" targetNamespace="http://schemas.microsoft.com/office/2006/metadata/properties" ma:root="true" ma:fieldsID="ff857beed7bb60264c77200005d14920" ns1:_="" ns3:_="" ns4:_="">
     <xsd:import namespace="http://schemas.microsoft.com/sharepoint/v3"/>
@@ -6145,6 +6167,15 @@
 </ct:contentTypeSchema>
 </file>
 
+<file path=customXml/item2.xml><?xml version="1.0" encoding="utf-8"?>
+<?mso-contentType ?>
+<FormTemplates xmlns="http://schemas.microsoft.com/sharepoint/v3/contenttype/forms">
+  <Display>DocumentLibraryForm</Display>
+  <Edit>DocumentLibraryForm</Edit>
+  <New>DocumentLibraryForm</New>
+</FormTemplates>
+</file>
+
 <file path=customXml/item3.xml><?xml version="1.0" encoding="utf-8"?>
 <p:properties xmlns:p="http://schemas.microsoft.com/office/2006/metadata/properties" xmlns:xsi="http://www.w3.org/2001/XMLSchema-instance" xmlns:pc="http://schemas.microsoft.com/office/infopath/2007/PartnerControls">
   <documentManagement>
@@ -6155,14 +6186,6 @@
 </file>
 
 <file path=customXml/itemProps1.xml><?xml version="1.0" encoding="utf-8"?>
-<ds:datastoreItem xmlns:ds="http://schemas.openxmlformats.org/officeDocument/2006/customXml" ds:itemID="{C9E4FD7B-F212-4C20-A600-A5D04CB08C22}">
-  <ds:schemaRefs>
-    <ds:schemaRef ds:uri="http://schemas.microsoft.com/sharepoint/v3/contenttype/forms"/>
-  </ds:schemaRefs>
-</ds:datastoreItem>
-</file>
-
-<file path=customXml/itemProps2.xml><?xml version="1.0" encoding="utf-8"?>
 <ds:datastoreItem xmlns:ds="http://schemas.openxmlformats.org/officeDocument/2006/customXml" ds:itemID="{32F81544-CB06-4B31-A173-C9B4E4168016}">
   <ds:schemaRefs>
     <ds:schemaRef ds:uri="http://schemas.microsoft.com/office/2006/metadata/contentType"/>
@@ -6178,6 +6201,14 @@
     <ds:schemaRef ds:uri="http://purl.org/dc/elements/1.1/"/>
     <ds:schemaRef ds:uri="http://purl.org/dc/terms/"/>
     <ds:schemaRef ds:uri="http://schemas.microsoft.com/internal/obd"/>
+  </ds:schemaRefs>
+</ds:datastoreItem>
+</file>
+
+<file path=customXml/itemProps2.xml><?xml version="1.0" encoding="utf-8"?>
+<ds:datastoreItem xmlns:ds="http://schemas.openxmlformats.org/officeDocument/2006/customXml" ds:itemID="{C9E4FD7B-F212-4C20-A600-A5D04CB08C22}">
+  <ds:schemaRefs>
+    <ds:schemaRef ds:uri="http://schemas.microsoft.com/sharepoint/v3/contenttype/forms"/>
   </ds:schemaRefs>
 </ds:datastoreItem>
 </file>
